--- a/ppt/19.1-digital-hot-potato.es.pptx
+++ b/ppt/19.1-digital-hot-potato.es.pptx
@@ -4861,8 +4861,8 @@
         </p:blipFill>
         <p:spPr>
           <a:xfrm>
-            <a:off x="1441138" y="1232015"/>
-            <a:ext cx="9331959" cy="5249226"/>
+            <a:off x="4611414" y="1197600"/>
+            <a:ext cx="2991407" cy="5318057"/>
           </a:xfrm>
           <a:prstGeom prst="rect">
             <a:avLst/>
